--- a/docs/Ticketing-Kickoff.pptx
+++ b/docs/Ticketing-Kickoff.pptx
@@ -5238,7 +5238,7 @@
                 </a:solidFill>
                 <a:latin typeface="Calibri"/>
               </a:rPr>
-              <a:t>• A · Agent self-assigns, or only Admin assigns?  → Admin assigns</a:t>
+              <a:t>• A · Agent self-assigns, or only Admin assigns?  → CONFIRMED: both — agents self-assign + Admin assigns/reassigns</a:t>
             </a:r>
           </a:p>
           <a:p>
@@ -5351,6 +5351,22 @@
                 <a:latin typeface="Calibri"/>
               </a:rPr>
               <a:t>• H · Adopt the 4 new SHOULD items (CSAT, analytics, auto-ack, escalate)?  → Yes</a:t>
+            </a:r>
+          </a:p>
+          <a:p>
+            <a:pPr>
+              <a:spcAft>
+                <a:spcPts val="1400"/>
+              </a:spcAft>
+            </a:pPr>
+            <a:r>
+              <a:rPr sz="2000" b="0">
+                <a:solidFill>
+                  <a:srgbClr val="1F3864"/>
+                </a:solidFill>
+                <a:latin typeface="Calibri"/>
+              </a:rPr>
+              <a:t>• I · Agents see all clients, or only their projects?  → Scoped to assigned projects</a:t>
             </a:r>
           </a:p>
         </p:txBody>
@@ -7084,7 +7100,7 @@
                 </a:solidFill>
                 <a:latin typeface="Calibri"/>
               </a:rPr>
-              <a:t>Works assigned tickets: status, comments, resolve.</a:t>
+              <a:t>Works tickets for their ASSIGNED PROJECTS only (clients they cover): status, comments, resolve.</a:t>
             </a:r>
           </a:p>
         </p:txBody>
@@ -9962,7 +9978,7 @@
                 </a:solidFill>
                 <a:latin typeface="Calibri"/>
               </a:rPr>
-              <a:t>Data model (6 tables)</a:t>
+              <a:t>Data model (7 tables)</a:t>
             </a:r>
           </a:p>
         </p:txBody>
@@ -10010,8 +10026,8 @@
         </p:nvSpPr>
         <p:spPr>
           <a:xfrm>
-            <a:off x="640080" y="1417320"/>
-            <a:ext cx="2926080" cy="658368"/>
+            <a:off x="640080" y="1371600"/>
+            <a:ext cx="2926080" cy="603504"/>
           </a:xfrm>
           <a:prstGeom prst="rect">
             <a:avLst/>
@@ -10054,7 +10070,7 @@
         </p:nvSpPr>
         <p:spPr>
           <a:xfrm>
-            <a:off x="731520" y="1536192"/>
+            <a:off x="731520" y="1490472"/>
             <a:ext cx="2743200" cy="457200"/>
           </a:xfrm>
           <a:prstGeom prst="rect">
@@ -10089,7 +10105,7 @@
         </p:nvSpPr>
         <p:spPr>
           <a:xfrm>
-            <a:off x="3749039" y="1463040"/>
+            <a:off x="3749039" y="1417320"/>
             <a:ext cx="7863840" cy="566928"/>
           </a:xfrm>
           <a:prstGeom prst="rect">
@@ -10124,8 +10140,8 @@
         </p:nvSpPr>
         <p:spPr>
           <a:xfrm>
-            <a:off x="640080" y="2167128"/>
-            <a:ext cx="2926080" cy="658368"/>
+            <a:off x="640080" y="2029967"/>
+            <a:ext cx="2926080" cy="603504"/>
           </a:xfrm>
           <a:prstGeom prst="rect">
             <a:avLst/>
@@ -10168,7 +10184,7 @@
         </p:nvSpPr>
         <p:spPr>
           <a:xfrm>
-            <a:off x="731520" y="2286000"/>
+            <a:off x="731520" y="2148839"/>
             <a:ext cx="2743200" cy="457200"/>
           </a:xfrm>
           <a:prstGeom prst="rect">
@@ -10203,7 +10219,7 @@
         </p:nvSpPr>
         <p:spPr>
           <a:xfrm>
-            <a:off x="3749039" y="2212848"/>
+            <a:off x="3749039" y="2075687"/>
             <a:ext cx="7863840" cy="566928"/>
           </a:xfrm>
           <a:prstGeom prst="rect">
@@ -10238,8 +10254,8 @@
         </p:nvSpPr>
         <p:spPr>
           <a:xfrm>
-            <a:off x="640080" y="2916936"/>
-            <a:ext cx="2926080" cy="658368"/>
+            <a:off x="640080" y="2688336"/>
+            <a:ext cx="2926080" cy="603504"/>
           </a:xfrm>
           <a:prstGeom prst="rect">
             <a:avLst/>
@@ -10282,7 +10298,7 @@
         </p:nvSpPr>
         <p:spPr>
           <a:xfrm>
-            <a:off x="731520" y="3035808"/>
+            <a:off x="731520" y="2807208"/>
             <a:ext cx="2743200" cy="457200"/>
           </a:xfrm>
           <a:prstGeom prst="rect">
@@ -10317,7 +10333,7 @@
         </p:nvSpPr>
         <p:spPr>
           <a:xfrm>
-            <a:off x="3749039" y="2962656"/>
+            <a:off x="3749039" y="2734056"/>
             <a:ext cx="7863840" cy="566928"/>
           </a:xfrm>
           <a:prstGeom prst="rect">
@@ -10352,8 +10368,8 @@
         </p:nvSpPr>
         <p:spPr>
           <a:xfrm>
-            <a:off x="640080" y="3666744"/>
-            <a:ext cx="2926080" cy="658368"/>
+            <a:off x="640080" y="3346704"/>
+            <a:ext cx="2926080" cy="603504"/>
           </a:xfrm>
           <a:prstGeom prst="rect">
             <a:avLst/>
@@ -10396,7 +10412,7 @@
         </p:nvSpPr>
         <p:spPr>
           <a:xfrm>
-            <a:off x="731520" y="3785616"/>
+            <a:off x="731520" y="3465576"/>
             <a:ext cx="2743200" cy="457200"/>
           </a:xfrm>
           <a:prstGeom prst="rect">
@@ -10431,7 +10447,7 @@
         </p:nvSpPr>
         <p:spPr>
           <a:xfrm>
-            <a:off x="3749039" y="3712464"/>
+            <a:off x="3749039" y="3392424"/>
             <a:ext cx="7863840" cy="566928"/>
           </a:xfrm>
           <a:prstGeom prst="rect">
@@ -10466,8 +10482,8 @@
         </p:nvSpPr>
         <p:spPr>
           <a:xfrm>
-            <a:off x="640080" y="4416552"/>
-            <a:ext cx="2926080" cy="658368"/>
+            <a:off x="640080" y="4005072"/>
+            <a:ext cx="2926080" cy="603504"/>
           </a:xfrm>
           <a:prstGeom prst="rect">
             <a:avLst/>
@@ -10510,7 +10526,7 @@
         </p:nvSpPr>
         <p:spPr>
           <a:xfrm>
-            <a:off x="731520" y="4535424"/>
+            <a:off x="731520" y="4123944"/>
             <a:ext cx="2743200" cy="457200"/>
           </a:xfrm>
           <a:prstGeom prst="rect">
@@ -10545,7 +10561,7 @@
         </p:nvSpPr>
         <p:spPr>
           <a:xfrm>
-            <a:off x="3749039" y="4462272"/>
+            <a:off x="3749039" y="4050791"/>
             <a:ext cx="7863840" cy="566928"/>
           </a:xfrm>
           <a:prstGeom prst="rect">
@@ -10580,8 +10596,8 @@
         </p:nvSpPr>
         <p:spPr>
           <a:xfrm>
-            <a:off x="640080" y="5166360"/>
-            <a:ext cx="2926080" cy="658368"/>
+            <a:off x="640080" y="4663440"/>
+            <a:ext cx="2926080" cy="603504"/>
           </a:xfrm>
           <a:prstGeom prst="rect">
             <a:avLst/>
@@ -10624,7 +10640,7 @@
         </p:nvSpPr>
         <p:spPr>
           <a:xfrm>
-            <a:off x="731520" y="5285232"/>
+            <a:off x="731520" y="4782312"/>
             <a:ext cx="2743200" cy="457200"/>
           </a:xfrm>
           <a:prstGeom prst="rect">
@@ -10659,7 +10675,7 @@
         </p:nvSpPr>
         <p:spPr>
           <a:xfrm>
-            <a:off x="3749039" y="5212080"/>
+            <a:off x="3749039" y="4709159"/>
             <a:ext cx="7863840" cy="566928"/>
           </a:xfrm>
           <a:prstGeom prst="rect">
@@ -10716,7 +10732,7 @@
                 </a:solidFill>
                 <a:latin typeface="Calibri"/>
               </a:rPr>
-              <a:t>Every ticket carries a company_id — that column is how we keep clients isolated.</a:t>
+              <a:t>Every ticket carries a company_id — that keeps clients isolated. Agents are further scoped to their projects via AGENT_COMPANIES.</a:t>
             </a:r>
           </a:p>
         </p:txBody>
@@ -10787,6 +10803,120 @@
                 <a:latin typeface="Calibri"/>
               </a:rPr>
               <a:t>8</a:t>
+            </a:r>
+          </a:p>
+        </p:txBody>
+      </p:sp>
+      <p:sp>
+        <p:nvSpPr>
+          <p:cNvPr id="21" name="Rectangle 20"/>
+          <p:cNvSpPr/>
+          <p:nvPr/>
+        </p:nvSpPr>
+        <p:spPr>
+          <a:xfrm>
+            <a:off x="640080" y="5321808"/>
+            <a:ext cx="2926080" cy="603504"/>
+          </a:xfrm>
+          <a:prstGeom prst="rect">
+            <a:avLst/>
+          </a:prstGeom>
+          <a:solidFill>
+            <a:srgbClr val="2E5496"/>
+          </a:solidFill>
+          <a:ln>
+            <a:noFill/>
+          </a:ln>
+          <a:effectLst/>
+        </p:spPr>
+        <p:style>
+          <a:lnRef idx="1">
+            <a:schemeClr val="accent1"/>
+          </a:lnRef>
+          <a:fillRef idx="3">
+            <a:schemeClr val="accent1"/>
+          </a:fillRef>
+          <a:effectRef idx="2">
+            <a:schemeClr val="accent1"/>
+          </a:effectRef>
+          <a:fontRef idx="minor">
+            <a:schemeClr val="lt1"/>
+          </a:fontRef>
+        </p:style>
+        <p:txBody>
+          <a:bodyPr rtlCol="0" anchor="ctr"/>
+          <a:lstStyle/>
+          <a:p>
+            <a:pPr algn="ctr"/>
+          </a:p>
+        </p:txBody>
+      </p:sp>
+      <p:sp>
+        <p:nvSpPr>
+          <p:cNvPr id="22" name="TextBox 21"/>
+          <p:cNvSpPr txBox="1"/>
+          <p:nvPr/>
+        </p:nvSpPr>
+        <p:spPr>
+          <a:xfrm>
+            <a:off x="731520" y="5440680"/>
+            <a:ext cx="2743200" cy="457200"/>
+          </a:xfrm>
+          <a:prstGeom prst="rect">
+            <a:avLst/>
+          </a:prstGeom>
+          <a:noFill/>
+        </p:spPr>
+        <p:txBody>
+          <a:bodyPr wrap="square" anchor="t">
+            <a:spAutoFit/>
+          </a:bodyPr>
+          <a:lstStyle/>
+          <a:p>
+            <a:pPr algn="l"/>
+            <a:r>
+              <a:rPr sz="1600" b="1" i="0">
+                <a:solidFill>
+                  <a:srgbClr val="FFFFFF"/>
+                </a:solidFill>
+                <a:latin typeface="Calibri"/>
+              </a:rPr>
+              <a:t>AGENT_COMPANIES</a:t>
+            </a:r>
+          </a:p>
+        </p:txBody>
+      </p:sp>
+      <p:sp>
+        <p:nvSpPr>
+          <p:cNvPr id="23" name="TextBox 22"/>
+          <p:cNvSpPr txBox="1"/>
+          <p:nvPr/>
+        </p:nvSpPr>
+        <p:spPr>
+          <a:xfrm>
+            <a:off x="3749039" y="5367528"/>
+            <a:ext cx="7863840" cy="566928"/>
+          </a:xfrm>
+          <a:prstGeom prst="rect">
+            <a:avLst/>
+          </a:prstGeom>
+          <a:noFill/>
+        </p:spPr>
+        <p:txBody>
+          <a:bodyPr wrap="square" anchor="ctr">
+            <a:spAutoFit/>
+          </a:bodyPr>
+          <a:lstStyle/>
+          <a:p>
+            <a:pPr algn="l"/>
+            <a:r>
+              <a:rPr sz="1700" b="0" i="0">
+                <a:solidFill>
+                  <a:srgbClr val="1F3864"/>
+                </a:solidFill>
+                <a:latin typeface="Calibri"/>
+              </a:rPr>
+              <a:t>which clients (projects) each agent covers</a:t>
             </a:r>
           </a:p>
         </p:txBody>

--- a/docs/Ticketing-Kickoff.pptx
+++ b/docs/Ticketing-Kickoff.pptx
@@ -8211,7 +8211,7 @@
         <p:spPr>
           <a:xfrm>
             <a:off x="640080" y="1371600"/>
-            <a:ext cx="3611880" cy="640080"/>
+            <a:ext cx="2592883" cy="640080"/>
           </a:xfrm>
           <a:prstGeom prst="rect">
             <a:avLst/>
@@ -8255,7 +8255,7 @@
         <p:spPr>
           <a:xfrm>
             <a:off x="640080" y="1426464"/>
-            <a:ext cx="3611880" cy="548640"/>
+            <a:ext cx="2592883" cy="548640"/>
           </a:xfrm>
           <a:prstGeom prst="rect">
             <a:avLst/>
@@ -8290,7 +8290,7 @@
         <p:spPr>
           <a:xfrm>
             <a:off x="640080" y="2057400"/>
-            <a:ext cx="3611880" cy="365760"/>
+            <a:ext cx="2592883" cy="365760"/>
           </a:xfrm>
           <a:prstGeom prst="rect">
             <a:avLst/>
@@ -8325,7 +8325,7 @@
         <p:spPr>
           <a:xfrm>
             <a:off x="777240" y="2560320"/>
-            <a:ext cx="3337560" cy="3657600"/>
+            <a:ext cx="2318563" cy="3657600"/>
           </a:xfrm>
           <a:prstGeom prst="rect">
             <a:avLst/>
@@ -8443,8 +8443,8 @@
         </p:nvSpPr>
         <p:spPr>
           <a:xfrm>
-            <a:off x="4434840" y="1371600"/>
-            <a:ext cx="3611880" cy="640080"/>
+            <a:off x="3412963" y="1371600"/>
+            <a:ext cx="2592883" cy="640080"/>
           </a:xfrm>
           <a:prstGeom prst="rect">
             <a:avLst/>
@@ -8487,8 +8487,8 @@
         </p:nvSpPr>
         <p:spPr>
           <a:xfrm>
-            <a:off x="4434840" y="1426464"/>
-            <a:ext cx="3611880" cy="548640"/>
+            <a:off x="3412963" y="1426464"/>
+            <a:ext cx="2592883" cy="548640"/>
           </a:xfrm>
           <a:prstGeom prst="rect">
             <a:avLst/>
@@ -8522,8 +8522,8 @@
         </p:nvSpPr>
         <p:spPr>
           <a:xfrm>
-            <a:off x="4434840" y="2057400"/>
-            <a:ext cx="3611880" cy="365760"/>
+            <a:off x="3412963" y="2057400"/>
+            <a:ext cx="2592883" cy="365760"/>
           </a:xfrm>
           <a:prstGeom prst="rect">
             <a:avLst/>
@@ -8557,8 +8557,8 @@
         </p:nvSpPr>
         <p:spPr>
           <a:xfrm>
-            <a:off x="4572000" y="2560320"/>
-            <a:ext cx="3337560" cy="3657600"/>
+            <a:off x="3550123" y="2560320"/>
+            <a:ext cx="2318563" cy="3657600"/>
           </a:xfrm>
           <a:prstGeom prst="rect">
             <a:avLst/>
@@ -8708,8 +8708,8 @@
         </p:nvSpPr>
         <p:spPr>
           <a:xfrm>
-            <a:off x="8229600" y="1371600"/>
-            <a:ext cx="3611880" cy="640080"/>
+            <a:off x="6185846" y="1371600"/>
+            <a:ext cx="2592883" cy="640080"/>
           </a:xfrm>
           <a:prstGeom prst="rect">
             <a:avLst/>
@@ -8752,8 +8752,8 @@
         </p:nvSpPr>
         <p:spPr>
           <a:xfrm>
-            <a:off x="8229600" y="1426464"/>
-            <a:ext cx="3611880" cy="548640"/>
+            <a:off x="6185846" y="1426464"/>
+            <a:ext cx="2592883" cy="548640"/>
           </a:xfrm>
           <a:prstGeom prst="rect">
             <a:avLst/>
@@ -8787,8 +8787,8 @@
         </p:nvSpPr>
         <p:spPr>
           <a:xfrm>
-            <a:off x="8229600" y="2057400"/>
-            <a:ext cx="3611880" cy="365760"/>
+            <a:off x="6185846" y="2057400"/>
+            <a:ext cx="2592883" cy="365760"/>
           </a:xfrm>
           <a:prstGeom prst="rect">
             <a:avLst/>
@@ -8822,8 +8822,8 @@
         </p:nvSpPr>
         <p:spPr>
           <a:xfrm>
-            <a:off x="8366760" y="2560320"/>
-            <a:ext cx="3337560" cy="3657600"/>
+            <a:off x="6323006" y="2560320"/>
+            <a:ext cx="2318563" cy="3657600"/>
           </a:xfrm>
           <a:prstGeom prst="rect">
             <a:avLst/>
@@ -8880,7 +8880,7 @@
                 </a:solidFill>
                 <a:latin typeface="Calibri"/>
               </a:rPr>
-              <a:t>• File attachments</a:t>
+              <a:t>• File / screenshot attachments</a:t>
             </a:r>
           </a:p>
           <a:p>
@@ -8967,6 +8967,255 @@
                 <a:latin typeface="Calibri"/>
               </a:rPr>
               <a:t>6</a:t>
+            </a:r>
+          </a:p>
+        </p:txBody>
+      </p:sp>
+      <p:sp>
+        <p:nvSpPr>
+          <p:cNvPr id="14" name="Rectangle 13"/>
+          <p:cNvSpPr/>
+          <p:nvPr/>
+        </p:nvSpPr>
+        <p:spPr>
+          <a:xfrm>
+            <a:off x="8958729" y="1371600"/>
+            <a:ext cx="2592883" cy="640080"/>
+          </a:xfrm>
+          <a:prstGeom prst="rect">
+            <a:avLst/>
+          </a:prstGeom>
+          <a:solidFill>
+            <a:srgbClr val="5B6473"/>
+          </a:solidFill>
+          <a:ln>
+            <a:noFill/>
+          </a:ln>
+          <a:effectLst/>
+        </p:spPr>
+        <p:style>
+          <a:lnRef idx="1">
+            <a:schemeClr val="accent1"/>
+          </a:lnRef>
+          <a:fillRef idx="3">
+            <a:schemeClr val="accent1"/>
+          </a:fillRef>
+          <a:effectRef idx="2">
+            <a:schemeClr val="accent1"/>
+          </a:effectRef>
+          <a:fontRef idx="minor">
+            <a:schemeClr val="lt1"/>
+          </a:fontRef>
+        </p:style>
+        <p:txBody>
+          <a:bodyPr rtlCol="0" anchor="ctr"/>
+          <a:lstStyle/>
+          <a:p>
+            <a:pPr algn="ctr"/>
+          </a:p>
+        </p:txBody>
+      </p:sp>
+      <p:sp>
+        <p:nvSpPr>
+          <p:cNvPr id="15" name="TextBox 14"/>
+          <p:cNvSpPr txBox="1"/>
+          <p:nvPr/>
+        </p:nvSpPr>
+        <p:spPr>
+          <a:xfrm>
+            <a:off x="8958729" y="1426464"/>
+            <a:ext cx="2592883" cy="548640"/>
+          </a:xfrm>
+          <a:prstGeom prst="rect">
+            <a:avLst/>
+          </a:prstGeom>
+          <a:noFill/>
+        </p:spPr>
+        <p:txBody>
+          <a:bodyPr wrap="square" anchor="t">
+            <a:spAutoFit/>
+          </a:bodyPr>
+          <a:lstStyle/>
+          <a:p>
+            <a:pPr algn="ctr"/>
+            <a:r>
+              <a:rPr sz="2000" b="1" i="0">
+                <a:solidFill>
+                  <a:srgbClr val="FFFFFF"/>
+                </a:solidFill>
+                <a:latin typeface="Calibri"/>
+              </a:rPr>
+              <a:t>FUTURE</a:t>
+            </a:r>
+          </a:p>
+        </p:txBody>
+      </p:sp>
+      <p:sp>
+        <p:nvSpPr>
+          <p:cNvPr id="16" name="TextBox 15"/>
+          <p:cNvSpPr txBox="1"/>
+          <p:nvPr/>
+        </p:nvSpPr>
+        <p:spPr>
+          <a:xfrm>
+            <a:off x="8958729" y="2057400"/>
+            <a:ext cx="2592883" cy="365760"/>
+          </a:xfrm>
+          <a:prstGeom prst="rect">
+            <a:avLst/>
+          </a:prstGeom>
+          <a:noFill/>
+        </p:spPr>
+        <p:txBody>
+          <a:bodyPr wrap="square" anchor="t">
+            <a:spAutoFit/>
+          </a:bodyPr>
+          <a:lstStyle/>
+          <a:p>
+            <a:pPr algn="ctr"/>
+            <a:r>
+              <a:rPr sz="1300" b="0" i="1">
+                <a:solidFill>
+                  <a:srgbClr val="595959"/>
+                </a:solidFill>
+                <a:latin typeface="Calibri"/>
+              </a:rPr>
+              <a:t>Out of scope now — the roadmap</a:t>
+            </a:r>
+          </a:p>
+        </p:txBody>
+      </p:sp>
+      <p:sp>
+        <p:nvSpPr>
+          <p:cNvPr id="17" name="TextBox 16"/>
+          <p:cNvSpPr txBox="1"/>
+          <p:nvPr/>
+        </p:nvSpPr>
+        <p:spPr>
+          <a:xfrm>
+            <a:off x="9095889" y="2560320"/>
+            <a:ext cx="2318563" cy="3657600"/>
+          </a:xfrm>
+          <a:prstGeom prst="rect">
+            <a:avLst/>
+          </a:prstGeom>
+          <a:noFill/>
+        </p:spPr>
+        <p:txBody>
+          <a:bodyPr wrap="square">
+            <a:spAutoFit/>
+          </a:bodyPr>
+          <a:lstStyle/>
+          <a:p>
+            <a:pPr>
+              <a:spcAft>
+                <a:spcPts val="800"/>
+              </a:spcAft>
+            </a:pPr>
+            <a:r>
+              <a:rPr sz="1600" b="0">
+                <a:solidFill>
+                  <a:srgbClr val="1F3864"/>
+                </a:solidFill>
+                <a:latin typeface="Calibri"/>
+              </a:rPr>
+              <a:t>• VPD / RLS row security</a:t>
+            </a:r>
+          </a:p>
+          <a:p>
+            <a:pPr>
+              <a:spcAft>
+                <a:spcPts val="800"/>
+              </a:spcAft>
+            </a:pPr>
+            <a:r>
+              <a:rPr sz="1600" b="0">
+                <a:solidFill>
+                  <a:srgbClr val="1F3864"/>
+                </a:solidFill>
+                <a:latin typeface="Calibri"/>
+              </a:rPr>
+              <a:t>• Real SLA engine (timers)</a:t>
+            </a:r>
+          </a:p>
+          <a:p>
+            <a:pPr>
+              <a:spcAft>
+                <a:spcPts val="800"/>
+              </a:spcAft>
+            </a:pPr>
+            <a:r>
+              <a:rPr sz="1600" b="0">
+                <a:solidFill>
+                  <a:srgbClr val="1F3864"/>
+                </a:solidFill>
+                <a:latin typeface="Calibri"/>
+              </a:rPr>
+              <a:t>• Object-storage attachments</a:t>
+            </a:r>
+          </a:p>
+          <a:p>
+            <a:pPr>
+              <a:spcAft>
+                <a:spcPts val="800"/>
+              </a:spcAft>
+            </a:pPr>
+            <a:r>
+              <a:rPr sz="1600" b="0">
+                <a:solidFill>
+                  <a:srgbClr val="1F3864"/>
+                </a:solidFill>
+                <a:latin typeface="Calibri"/>
+              </a:rPr>
+              <a:t>• Project Lead role (is_lead)</a:t>
+            </a:r>
+          </a:p>
+          <a:p>
+            <a:pPr>
+              <a:spcAft>
+                <a:spcPts val="800"/>
+              </a:spcAft>
+            </a:pPr>
+            <a:r>
+              <a:rPr sz="1600" b="0">
+                <a:solidFill>
+                  <a:srgbClr val="1F3864"/>
+                </a:solidFill>
+                <a:latin typeface="Calibri"/>
+              </a:rPr>
+              <a:t>• Email-to-ticket intake</a:t>
+            </a:r>
+          </a:p>
+          <a:p>
+            <a:pPr>
+              <a:spcAft>
+                <a:spcPts val="800"/>
+              </a:spcAft>
+            </a:pPr>
+            <a:r>
+              <a:rPr sz="1600" b="0">
+                <a:solidFill>
+                  <a:srgbClr val="1F3864"/>
+                </a:solidFill>
+                <a:latin typeface="Calibri"/>
+              </a:rPr>
+              <a:t>• SSO / directory login</a:t>
+            </a:r>
+          </a:p>
+          <a:p>
+            <a:pPr>
+              <a:spcAft>
+                <a:spcPts val="800"/>
+              </a:spcAft>
+            </a:pPr>
+            <a:r>
+              <a:rPr sz="1600" b="0">
+                <a:solidFill>
+                  <a:srgbClr val="1F3864"/>
+                </a:solidFill>
+                <a:latin typeface="Calibri"/>
+              </a:rPr>
+              <a:t>• KB portal &amp; integrations</a:t>
             </a:r>
           </a:p>
         </p:txBody>

--- a/docs/Ticketing-Kickoff.pptx
+++ b/docs/Ticketing-Kickoff.pptx
@@ -8695,7 +8695,8 @@
                 </a:solidFill>
                 <a:latin typeface="Calibri"/>
               </a:rPr>
-              <a:t>• Escalate action</a:t>
+              <a:t>• Escalate action
+• SLA per severity (breach indicators)</a:t>
             </a:r>
           </a:p>
         </p:txBody>
@@ -8848,7 +8849,7 @@
                 </a:solidFill>
                 <a:latin typeface="Calibri"/>
               </a:rPr>
-              <a:t>• SLA highlight (no timers)</a:t>
+              <a:t/>
             </a:r>
           </a:p>
           <a:p>
@@ -8896,7 +8897,7 @@
                 </a:solidFill>
                 <a:latin typeface="Calibri"/>
               </a:rPr>
-              <a:t>• Knowledge base</a:t>
+              <a:t/>
             </a:r>
           </a:p>
         </p:txBody>

--- a/docs/Ticketing-Kickoff.pptx
+++ b/docs/Ticketing-Kickoff.pptx
@@ -8696,7 +8696,13 @@
                 <a:latin typeface="Calibri"/>
               </a:rPr>
               <a:t>• Escalate action
-• SLA per severity (breach indicators)</a:t>
+• SLA per severity (breach indicators)
+• Status-change notifications (ITIL)
+• Ticket type: Incident / Service Request
+• First-response time tracking
+• SLA Compliance % KPI
+• Workload in assignment LOV
+• Severity guidance on create form</a:t>
             </a:r>
           </a:p>
         </p:txBody>
@@ -8810,7 +8816,7 @@
                 </a:solidFill>
                 <a:latin typeface="Calibri"/>
               </a:rPr>
-              <a:t>Only if ahead — don't commit</a:t>
+              <a:t>Only if ahead of schedule — don't commit</a:t>
             </a:r>
           </a:p>
         </p:txBody>
@@ -8932,7 +8938,7 @@
                 </a:solidFill>
                 <a:latin typeface="Calibri"/>
               </a:rPr>
-              <a:t>Service Desk Ticketing System  ·  APEX Hackathon</a:t>
+              <a:t>Service Desk Ticketing System  ·  APEX Service Desk</a:t>
             </a:r>
           </a:p>
         </p:txBody>
@@ -9081,7 +9087,7 @@
                 </a:solidFill>
                 <a:latin typeface="Calibri"/>
               </a:rPr>
-              <a:t>Out of scope now — the roadmap</a:t>
+              <a:t>Out of scope for demo — ITIL production roadmap</a:t>
             </a:r>
           </a:p>
         </p:txBody>

--- a/docs/Ticketing-Kickoff.pptx
+++ b/docs/Ticketing-Kickoff.pptx
@@ -8695,8 +8695,9 @@
                 </a:solidFill>
                 <a:latin typeface="Calibri"/>
               </a:rPr>
-              <a:t>• Escalate action
-• SLA per severity (breach indicators)
+              <a:t>• Reassign to higher tier (L1-L4)
+• Auto-escalation on SLA breach
+• SLA per severity per project (breach indicators)
 • Status-change notifications (ITIL)
 • Ticket type: Incident / Service Request
 • First-response time tracking

--- a/docs/Ticketing-Kickoff.pptx
+++ b/docs/Ticketing-Kickoff.pptx
@@ -8433,6 +8433,22 @@
               <a:t>• Dashboard</a:t>
             </a:r>
           </a:p>
+          <a:p>
+            <a:pPr>
+              <a:spcAft>
+                <a:spcPts val="800"/>
+              </a:spcAft>
+            </a:pPr>
+            <a:r>
+              <a:rPr sz="1600" b="0">
+                <a:solidFill>
+                  <a:srgbClr val="1F3864"/>
+                </a:solidFill>
+                <a:latin typeface="Calibri"/>
+              </a:rPr>
+              <a:t>• Ticket type: Incident / Service Request</a:t>
+            </a:r>
+          </a:p>
         </p:txBody>
       </p:sp>
       <p:sp>
@@ -8696,10 +8712,10 @@
                 <a:latin typeface="Calibri"/>
               </a:rPr>
               <a:t>• Reassign to higher tier (L1-L4)
-• Auto-escalation on SLA breach
+• Auto-escalation on SLA breach (two-stage, per-company threshold, ITIL 4)
 • SLA per severity per project (breach indicators)
 • Status-change notifications (ITIL)
-• Ticket type: Incident / Service Request
+• Resolution code + summary on Resolve\n• Triage gate (priority before In Progress)
 • First-response time tracking
 • SLA Compliance % KPI
 • Workload in assignment LOV

--- a/docs/Ticketing-Kickoff.pptx
+++ b/docs/Ticketing-Kickoff.pptx
@@ -8350,7 +8350,7 @@
                 </a:solidFill>
                 <a:latin typeface="Calibri"/>
               </a:rPr>
-              <a:t>• Companies + users + roles</a:t>
+              <a:t>• Companies + projects + users + roles</a:t>
             </a:r>
           </a:p>
           <a:p>
@@ -8712,7 +8712,7 @@
                 <a:latin typeface="Calibri"/>
               </a:rPr>
               <a:t>• Reassign to higher tier (L1-L4)
-• Auto-escalation on SLA breach (two-stage, per-company threshold, ITIL 4)
+• Auto-escalation on SLA breach (two-stage, per-project threshold, ITIL 4)
 • SLA per severity per project (breach indicators)
 • Status-change notifications (ITIL)
 • Resolution code + summary on Resolve\n• Triage gate (priority before In Progress)

--- a/docs/Ticketing-Kickoff.pptx
+++ b/docs/Ticketing-Kickoff.pptx
@@ -8713,7 +8713,7 @@
               </a:rPr>
               <a:t>• Reassign to higher tier (L1-L4)
 • Auto-escalation on SLA breach (two-stage, per-project threshold, ITIL 4)
-• SLA per severity per project (breach indicators)
+• Named SLA policies - per-severity targets (breach indicators)
 • Status-change notifications (ITIL)
 • Resolution code + summary on Resolve\n• Triage gate (priority before In Progress)
 • First-response time tracking

--- a/docs/Ticketing-Kickoff.pptx
+++ b/docs/Ticketing-Kickoff.pptx
@@ -11365,7 +11365,7 @@
                 </a:solidFill>
                 <a:latin typeface="Calibri"/>
               </a:rPr>
-              <a:t>One page serves many roles · authorization + WHERE company_id · 12 pages → 10 MUST, 2 SHOULD</a:t>
+              <a:t>One page serves many roles · authorization + WHERE company_id · 18 pages → 12 MUST, 6 SHOULD</a:t>
             </a:r>
           </a:p>
         </p:txBody>
@@ -13173,7 +13173,7 @@
                 </a:solidFill>
                 <a:latin typeface="Calibri"/>
               </a:rPr>
-              <a:t>Demo needs only the 10 MUST pages. Status changes, comments &amp; history = buttons/regions on Ticket Detail — not pages.</a:t>
+              <a:t>Demo needs only the 12 MUST pages. Status changes, comments &amp; history = buttons/regions on Ticket Detail — not pages.</a:t>
             </a:r>
           </a:p>
         </p:txBody>

--- a/docs/Ticketing-Kickoff.pptx
+++ b/docs/Ticketing-Kickoff.pptx
@@ -8719,7 +8719,9 @@
 • First-response time tracking
 • SLA Compliance % KPI
 • Workload in assignment LOV
-• Severity guidance on create form</a:t>
+• Severity guidance on create form
+• File / screenshot attachments
+</a:t>
             </a:r>
           </a:p>
         </p:txBody>
@@ -8904,7 +8906,7 @@
                 </a:solidFill>
                 <a:latin typeface="Calibri"/>
               </a:rPr>
-              <a:t>• File / screenshot attachments</a:t>
+              <a:t/>
             </a:r>
           </a:p>
           <a:p>
